--- a/clients/bigorange-marketing/deliverables/2026-09-02-wordpress-growth-package-redesign/BigOrange-Thursday-WordPress-Growth-Review-2026-09-03.pptx
+++ b/clients/bigorange-marketing/deliverables/2026-09-02-wordpress-growth-package-redesign/BigOrange-Thursday-WordPress-Growth-Review-2026-09-03.pptx
@@ -516,7 +516,7 @@
           <a:p>
             <a:r>
               <a:rPr lang="en-US" dirty="0"/>
-              <a:t>Open with the decision: this is a controlled growth system, not a publish-everything content dump.
+              <a:t>Start with the headline: this is a controlled system, not a dump-everything content push.
 [Sources]
 Internal BigOrange working package; September 2, 2026.
 [/Sources]</a:t>
@@ -607,7 +607,7 @@
           <a:p>
             <a:r>
               <a:rPr lang="en-US" dirty="0"/>
-              <a:t>All five are complete standalone articles, not sections of one article.
+              <a:t>Each of these five stands alone, not a chapter of one bigger article.
 [Sources]
 Five-blog package manifest dated September 2, 2026.
 [/Sources]</a:t>
@@ -698,7 +698,7 @@
           <a:p>
             <a:r>
               <a:rPr lang="en-US" dirty="0"/>
-              <a:t>Visible usefulness comes first. Schema supports interpretation; it does not manufacture authority.
+              <a:t>Usefulness on the page comes first. Schema just helps machines read it, it doesn’t manufacture authority.
 [Sources]
 Google Search Central: creating helpful, reliable, people-first content.
 Google Search Central: Article structured data.
@@ -790,7 +790,7 @@
           <a:p>
             <a:r>
               <a:rPr lang="en-US" dirty="0"/>
-              <a:t>This is the private WordPress staging gate. Emphasize reversible drafts and explicit approval.
+              <a:t>This is the private staging gate in WordPress. Drafts stay reversible, and approval is explicit.
 [Sources]
 Internal BigOrange working package; September 2, 2026.
 [/Sources]</a:t>
@@ -881,7 +881,7 @@
           <a:p>
             <a:r>
               <a:rPr lang="en-US" dirty="0"/>
-              <a:t>Do not equate a rank or a view with revenue. Preserve the chain.
+              <a:t>Don’t let a rank or a view stand in for revenue. Walk the whole chain.
 [Sources]
 Internal BigOrange working package; September 2, 2026.
 [/Sources]</a:t>
@@ -972,7 +972,7 @@
           <a:p>
             <a:r>
               <a:rPr lang="en-US" dirty="0"/>
-              <a:t>The cadence is deliberately controlled so the team can learn and protect existing rankings.
+              <a:t>We’re pacing this on purpose, so the team can learn and protect what already ranks.
 [Sources]
 Internal BigOrange working package; September 2, 2026.
 [/Sources]</a:t>
@@ -1063,7 +1063,7 @@
           <a:p>
             <a:r>
               <a:rPr lang="en-US" dirty="0"/>
-              <a:t>Close by assigning owners and the first release dates. Keep Phase 2 as a separate commercial decision.
+              <a:t>Close by locking in owners and the first release dates. Keep Phase 2 as its own decision.
 [Sources]
 Internal BigOrange working package; September 2, 2026.
 [/Sources]</a:t>
@@ -1154,7 +1154,7 @@
           <a:p>
             <a:r>
               <a:rPr lang="en-US" dirty="0"/>
-              <a:t>Re-anchor the room in the signed scope before discussing the additional work.
+              <a:t>Ground us in the signed scope first, then get into everything on top of it.
 [Sources]
 Original BigOrange proposal and working packet.
 [/Sources]</a:t>
@@ -1245,7 +1245,7 @@
           <a:p>
             <a:r>
               <a:rPr lang="en-US" dirty="0"/>
-              <a:t>Use the no-charge language exactly as a statement of investment, not as an unlimited ongoing scope.
+              <a:t>Frame the no-charge work as a statement of investment, not an open-ended scope.
 [Sources]
 Internal BigOrange working package; September 2, 2026.
 [/Sources]</a:t>
@@ -1336,7 +1336,7 @@
           <a:p>
             <a:r>
               <a:rPr lang="en-US" dirty="0"/>
-              <a:t>Make the governance boundary explicit. Current public hub remains unchanged.
+              <a:t>Be plain about the line here: what’s live stays live until someone signs off.
 [Sources]
 September 1, 2026 public crawl and WordPress inventory.
 [/Sources]</a:t>
@@ -1427,7 +1427,7 @@
           <a:p>
             <a:r>
               <a:rPr lang="en-US" dirty="0"/>
-              <a:t>These are leverage fixes because they affect interpretation, discovery, rendering or distribution.
+              <a:t>These fixes matter because they change how the site gets read, found, and shown.
 [Sources]
 September 1, 2026 public crawl.
 August 20, 2026 builder hub mobile performance sample.
@@ -1519,7 +1519,7 @@
           <a:p>
             <a:r>
               <a:rPr lang="en-US" dirty="0"/>
-              <a:t>Keep the language disciplined: sample, then remeasure.
+              <a:t>Stay disciplined here: it’s one sample, and we remeasure after the fixes land.
 [Sources]
 August 20, 2026 builder hub mobile performance sample.
 [/Sources]</a:t>
@@ -1610,7 +1610,7 @@
           <a:p>
             <a:r>
               <a:rPr lang="en-US" dirty="0"/>
-              <a:t>Moz is a dated snapshot, not a live ranking guarantee.
+              <a:t>Remember Moz is a snapshot in time, not live rankings.
 [Sources]
 Moz snapshot dated August 14, 2026.
 [/Sources]</a:t>
@@ -1701,7 +1701,7 @@
           <a:p>
             <a:r>
               <a:rPr lang="en-US" dirty="0"/>
-              <a:t>This is the universal release contract. The wording and proof pattern still vary by template.
+              <a:t>This is the release checklist for every page. Wording and proof still differ by template.
 [Sources]
 Google Search Central: creating helpful, reliable, people-first content.
 Google Search Central: Article structured data.
@@ -1793,7 +1793,7 @@
           <a:p>
             <a:r>
               <a:rPr lang="en-US" dirty="0"/>
-              <a:t>Explain that the service page remains the commercial destination while articles answer narrower questions.
+              <a:t>Explain that the service page stays the sales destination, and the articles just answer the narrower questions.
 [Sources]
 BigOrange authority package inventory and internal-link map.
 [/Sources]</a:t>
@@ -2315,7 +2315,7 @@
                 <a:ea typeface="Montserrat" pitchFamily="34" charset="-122"/>
                 <a:cs typeface="Montserrat" pitchFamily="34" charset="-120"/>
               </a:rPr>
-              <a:t>WordPress growth, made operational.</a:t>
+              <a:t>Where your WordPress site stands.</a:t>
             </a:r>
             <a:endParaRPr lang="en-US" sz="5000" dirty="0"/>
           </a:p>
@@ -2354,7 +2354,7 @@
                 <a:ea typeface="Arial" pitchFamily="34" charset="-122"/>
                 <a:cs typeface="Arial" pitchFamily="34" charset="-120"/>
               </a:rPr>
-              <a:t>A 370 URL technical plan, a 24 asset authority system, five new builder blogs, and the release controls that turn content into qualified demand.</a:t>
+              <a:t>A 370 URL technical plan, a 24 asset authority system, five new builder blogs, and the checks that turn content into real leads.</a:t>
             </a:r>
             <a:endParaRPr lang="en-US" sz="1500" dirty="0"/>
           </a:p>
@@ -3936,7 +3936,7 @@
                 <a:ea typeface="Montserrat" pitchFamily="34" charset="-122"/>
                 <a:cs typeface="Montserrat" pitchFamily="34" charset="-120"/>
               </a:rPr>
-              <a:t>What is baked into every blog</a:t>
+              <a:t>What’s built into every blog</a:t>
             </a:r>
             <a:endParaRPr lang="en-US" sz="3000" dirty="0"/>
           </a:p>
@@ -4127,7 +4127,7 @@
                 <a:ea typeface="Arial" pitchFamily="34" charset="-122"/>
                 <a:cs typeface="Arial" pitchFamily="34" charset="-120"/>
               </a:rPr>
-              <a:t>A direct answer, definition and descriptive headings make the page easy for people and machines to parse.</a:t>
+              <a:t>A direct answer, a clear definition and descriptive headings make the page easy to read, for people and machines.</a:t>
             </a:r>
             <a:endParaRPr lang="en-US" sz="1100" dirty="0"/>
           </a:p>
@@ -4318,7 +4318,7 @@
                 <a:ea typeface="Arial" pitchFamily="34" charset="-122"/>
                 <a:cs typeface="Arial" pitchFamily="34" charset="-120"/>
               </a:rPr>
-              <a:t>Tables, steps, tradeoffs and specific review questions create usefulness beyond generic summaries.</a:t>
+              <a:t>Tables, steps, tradeoffs and real review questions make the page more useful than a generic summary.</a:t>
             </a:r>
             <a:endParaRPr lang="en-US" sz="1100" dirty="0"/>
           </a:p>
@@ -4509,7 +4509,7 @@
                 <a:ea typeface="Arial" pitchFamily="34" charset="-122"/>
                 <a:cs typeface="Arial" pitchFamily="34" charset="-120"/>
               </a:rPr>
-              <a:t>Current sources, explicit caveats, named review gates and no invented results or guarantees.</a:t>
+              <a:t>Current sources, clear caveats, named review gates, and never an invented result or guarantee.</a:t>
             </a:r>
             <a:endParaRPr lang="en-US" sz="1100" dirty="0"/>
           </a:p>
@@ -4700,7 +4700,7 @@
                 <a:ea typeface="Arial" pitchFamily="34" charset="-122"/>
                 <a:cs typeface="Arial" pitchFamily="34" charset="-120"/>
               </a:rPr>
-              <a:t>BlogPosting and Breadcrumb candidates mirror visible content. FAQs stay reader-first without a rich-result promise.</a:t>
+              <a:t>BlogPosting and Breadcrumb data mirror what’s on the page. FAQs are written for readers, not for a rich-result promise.</a:t>
             </a:r>
             <a:endParaRPr lang="en-US" sz="1100" dirty="0"/>
           </a:p>
@@ -5977,7 +5977,7 @@
                 <a:ea typeface="Montserrat" pitchFamily="34" charset="-122"/>
                 <a:cs typeface="Montserrat" pitchFamily="34" charset="-120"/>
               </a:rPr>
-              <a:t>No draft enters the sitemap. No public publish occurs without a named release owner.</a:t>
+              <a:t>No draft hits the sitemap. Nothing goes public without a named release owner.</a:t>
             </a:r>
             <a:endParaRPr lang="en-US" sz="1500" dirty="0"/>
           </a:p>
@@ -6214,7 +6214,7 @@
                 <a:ea typeface="Montserrat" pitchFamily="34" charset="-122"/>
                 <a:cs typeface="Montserrat" pitchFamily="34" charset="-120"/>
               </a:rPr>
-              <a:t>Rankings become useful when they connect to sales truth</a:t>
+              <a:t>Rankings only matter once they lead to a sale</a:t>
             </a:r>
             <a:endParaRPr lang="en-US" sz="3000" dirty="0"/>
           </a:p>
@@ -7325,7 +7325,7 @@
                 <a:ea typeface="Montserrat" pitchFamily="34" charset="-122"/>
                 <a:cs typeface="Montserrat" pitchFamily="34" charset="-120"/>
               </a:rPr>
-              <a:t>Repair first. Release in waves. Learn before scaling.</a:t>
+              <a:t>Fix it first. Ship in waves. Learn before scaling.</a:t>
             </a:r>
             <a:endParaRPr lang="en-US" sz="3000" dirty="0"/>
           </a:p>
@@ -7932,7 +7932,7 @@
                 <a:ea typeface="Montserrat" pitchFamily="34" charset="-122"/>
                 <a:cs typeface="Montserrat" pitchFamily="34" charset="-120"/>
               </a:rPr>
-              <a:t>12-month scale: expand only where Search Console, client questions and sales feedback justify the next asset.</a:t>
+              <a:t>12-month scale: we only add more where Search Console, client questions and sales feedback say it’s worth it.</a:t>
             </a:r>
             <a:endParaRPr lang="en-US" sz="1400" dirty="0"/>
           </a:p>
@@ -8169,7 +8169,7 @@
                 <a:ea typeface="Montserrat" pitchFamily="34" charset="-122"/>
                 <a:cs typeface="Montserrat" pitchFamily="34" charset="-120"/>
               </a:rPr>
-              <a:t>Seven decisions that unlock the work</a:t>
+              <a:t>Seven decisions that get this moving</a:t>
             </a:r>
             <a:endParaRPr lang="en-US" sz="3000" dirty="0"/>
           </a:p>
@@ -8954,7 +8954,7 @@
                 <a:ea typeface="Arial" pitchFamily="34" charset="-122"/>
                 <a:cs typeface="Arial" pitchFamily="34" charset="-120"/>
               </a:rPr>
-              <a:t>The goal is a named owner, a release sequence and a measurement contract — not a longer idea list.</a:t>
+              <a:t>The goal is a named owner, a release order and a way to measure it, not a longer idea list.</a:t>
             </a:r>
             <a:endParaRPr lang="en-US" sz="1400" dirty="0"/>
           </a:p>
@@ -9191,7 +9191,7 @@
                 <a:ea typeface="Montserrat" pitchFamily="34" charset="-122"/>
                 <a:cs typeface="Montserrat" pitchFamily="34" charset="-120"/>
               </a:rPr>
-              <a:t>What the paid pilot actually asked for</a:t>
+              <a:t>What we actually agreed to</a:t>
             </a:r>
             <a:endParaRPr lang="en-US" sz="3000" dirty="0"/>
           </a:p>
@@ -9333,7 +9333,7 @@
                 <a:ea typeface="Arial" pitchFamily="34" charset="-122"/>
                 <a:cs typeface="Arial" pitchFamily="34" charset="-120"/>
               </a:rPr>
-              <a:t>Discovery, audit, keyword and content strategy, architecture, priorities and implementation planning.</a:t>
+              <a:t>A full audit, a keyword and content strategy, plus the architecture, priorities and plan for building it.</a:t>
             </a:r>
             <a:endParaRPr lang="en-US" sz="1250" dirty="0"/>
           </a:p>
@@ -9475,7 +9475,7 @@
                 <a:ea typeface="Arial" pitchFamily="34" charset="-122"/>
                 <a:cs typeface="Arial" pitchFamily="34" charset="-120"/>
               </a:rPr>
-              <a:t>One pillar page, two supporting articles, technical SEO and WordPress implementation support.</a:t>
+              <a:t>One pillar page, two supporting articles, and hands-on technical SEO and WordPress help.</a:t>
             </a:r>
             <a:endParaRPr lang="en-US" sz="1250" dirty="0"/>
           </a:p>
@@ -9617,7 +9617,7 @@
                 <a:ea typeface="Arial" pitchFamily="34" charset="-122"/>
                 <a:cs typeface="Arial" pitchFamily="34" charset="-120"/>
               </a:rPr>
-              <a:t>35 hours at $30 per hour. Phase 2 social, downloadable and webinar production remained a future scope, not part of the paid pilot.</a:t>
+              <a:t>35 hours at $30 an hour. Phase 2 social, downloadable and webinar work stayed out of scope for this pilot.</a:t>
             </a:r>
             <a:endParaRPr lang="en-US" sz="1250" dirty="0"/>
           </a:p>
@@ -9854,7 +9854,7 @@
                 <a:ea typeface="Montserrat" pitchFamily="34" charset="-122"/>
                 <a:cs typeface="Montserrat" pitchFamily="34" charset="-120"/>
               </a:rPr>
-              <a:t>What is now ready for review</a:t>
+              <a:t>What is ready for you to look at</a:t>
             </a:r>
             <a:endParaRPr lang="en-US" sz="3000" dirty="0"/>
           </a:p>
@@ -10411,7 +10411,7 @@
                 <a:ea typeface="Arial" pitchFamily="34" charset="-122"/>
                 <a:cs typeface="Arial" pitchFamily="34" charset="-120"/>
               </a:rPr>
-              <a:t>The five new blogs, deeper page-level optimization framework, six branded PDFs, implementation packaging and this leadership deck are included as additional proof of how invested I am in BigOrange and the work you deliver for clients.</a:t>
+              <a:t>The five new blogs, a deeper page-level optimization framework, six branded PDFs, implementation packaging and this leadership deck are all extra, my way of showing how invested I am in BigOrange and the work you do for clients.</a:t>
             </a:r>
             <a:endParaRPr lang="en-US" sz="1200" dirty="0"/>
           </a:p>
@@ -10440,7 +10440,7 @@
                 <a:ea typeface="Arial" pitchFamily="34" charset="-122"/>
                 <a:cs typeface="Arial" pitchFamily="34" charset="-120"/>
               </a:rPr>
-              <a:t>Public release, imagery and factual claims still require BigOrange approval.</a:t>
+              <a:t>Public release, imagery and factual claims still need BigOrange approval.</a:t>
             </a:r>
             <a:endParaRPr lang="en-US" sz="1200" dirty="0"/>
           </a:p>
@@ -10479,7 +10479,7 @@
                 <a:ea typeface="Montserrat" pitchFamily="34" charset="-122"/>
                 <a:cs typeface="Montserrat" pitchFamily="34" charset="-120"/>
               </a:rPr>
-              <a:t>Additional work, delivered at no charge, on top of the signed 35 hour pilot.</a:t>
+              <a:t>Extra work, done at no charge, on top of the signed 35 hour pilot.</a:t>
             </a:r>
             <a:endParaRPr lang="en-US" sz="1800" dirty="0"/>
           </a:p>
@@ -10716,7 +10716,7 @@
                 <a:ea typeface="Montserrat" pitchFamily="34" charset="-122"/>
                 <a:cs typeface="Montserrat" pitchFamily="34" charset="-120"/>
               </a:rPr>
-              <a:t>One system: crawlability, answers, proof and conversion</a:t>
+              <a:t>One site, working start to finish</a:t>
             </a:r>
             <a:endParaRPr lang="en-US" sz="3000" dirty="0"/>
           </a:p>
@@ -11273,7 +11273,7 @@
                 <a:ea typeface="Arial" pitchFamily="34" charset="-122"/>
                 <a:cs typeface="Arial" pitchFamily="34" charset="-120"/>
               </a:rPr>
-              <a:t>The new blogs and collateral are staged for private review. Existing public content stays untouched until a named owner approves facts, images, metadata, links, schema and release timing.</a:t>
+              <a:t>The new blogs and collateral are sitting in private review. What’s live now stays live until a named owner signs off on the facts, images, links, and when it goes out.</a:t>
             </a:r>
             <a:endParaRPr lang="en-US" sz="1250" dirty="0"/>
           </a:p>
@@ -11336,7 +11336,7 @@
                 <a:ea typeface="Montserrat" pitchFamily="34" charset="-122"/>
                 <a:cs typeface="Montserrat" pitchFamily="34" charset="-120"/>
               </a:rPr>
-              <a:t>Current public builder hub remains unchanged.</a:t>
+              <a:t>The builder hub you have live today isn’t touched.</a:t>
             </a:r>
             <a:endParaRPr lang="en-US" sz="1400" dirty="0"/>
           </a:p>
@@ -11573,7 +11573,7 @@
                 <a:ea typeface="Montserrat" pitchFamily="34" charset="-122"/>
                 <a:cs typeface="Montserrat" pitchFamily="34" charset="-120"/>
               </a:rPr>
-              <a:t>Where site health is leaking authority</a:t>
+              <a:t>Where the site is losing ground</a:t>
             </a:r>
             <a:endParaRPr lang="en-US" sz="3000" dirty="0"/>
           </a:p>
@@ -12088,7 +12088,7 @@
                 <a:ea typeface="Montserrat" pitchFamily="34" charset="-122"/>
                 <a:cs typeface="Montserrat" pitchFamily="34" charset="-120"/>
               </a:rPr>
-              <a:t>Correct signals before scaling content</a:t>
+              <a:t>Fix the signals before you scale content</a:t>
             </a:r>
             <a:endParaRPr lang="en-US" sz="1600" dirty="0"/>
           </a:p>
@@ -12130,7 +12130,7 @@
                 <a:ea typeface="Arial" pitchFamily="34" charset="-122"/>
                 <a:cs typeface="Arial" pitchFamily="34" charset="-120"/>
               </a:rPr>
-              <a:t>Fix the homepage “Stategic” typo across meta, Open Graph and schema. Reduce the AI services page from four H1s to one. Review nofollow page by page. Repair sitemap eligibility. Re-test the builder hub mobile critical path after media and script work.</a:t>
+              <a:t>Fix the homepage “Stategic” typo across meta, Open Graph and schema. Cut the AI services page from four H1s to one. Check nofollow page by page. Fix sitemap eligibility. Re-test the builder hub on mobile after the media and script work.</a:t>
             </a:r>
             <a:endParaRPr lang="en-US" sz="1200" dirty="0"/>
           </a:p>
@@ -12193,7 +12193,7 @@
                 <a:ea typeface="Montserrat" pitchFamily="34" charset="-122"/>
                 <a:cs typeface="Montserrat" pitchFamily="34" charset="-120"/>
               </a:rPr>
-              <a:t>These affect interpretation, discovery, rendering or distribution.</a:t>
+              <a:t>These change how the site gets read, found, and shown.</a:t>
             </a:r>
             <a:endParaRPr lang="en-US" sz="1400" dirty="0"/>
           </a:p>
@@ -12430,7 +12430,7 @@
                 <a:ea typeface="Montserrat" pitchFamily="34" charset="-122"/>
                 <a:cs typeface="Montserrat" pitchFamily="34" charset="-120"/>
               </a:rPr>
-              <a:t>The builder hub has a performance problem, not a cosmetic one</a:t>
+              <a:t>The builder hub is slow, and that matters</a:t>
             </a:r>
             <a:endParaRPr lang="en-US" sz="3000" dirty="0"/>
           </a:p>
@@ -12699,7 +12699,7 @@
                 <a:ea typeface="Arial" pitchFamily="34" charset="-122"/>
                 <a:cs typeface="Arial" pitchFamily="34" charset="-120"/>
               </a:rPr>
-              <a:t>Re-measure after image sizing, format, preload, font, third-party script and critical CSS work. A single sample is a diagnostic baseline, not a permanent score.</a:t>
+              <a:t>We’ll re-test after fixing image sizing, formats, preload, fonts, third-party scripts and critical CSS. One sample is a starting point, not a final grade.</a:t>
             </a:r>
             <a:endParaRPr lang="en-US" sz="1400" dirty="0"/>
           </a:p>
@@ -13493,7 +13493,7 @@
                 <a:ea typeface="Arial" pitchFamily="34" charset="-122"/>
                 <a:cs typeface="Arial" pitchFamily="34" charset="-120"/>
               </a:rPr>
-              <a:t>Thirteen builder terms are already in positions 1–3, all pointing to the builder hub. That page remains the commercial owner.</a:t>
+              <a:t>Thirteen builder terms already sit in positions 1–3, all pointing to the builder hub. That page stays the one that sells.</a:t>
             </a:r>
             <a:endParaRPr lang="en-US" sz="1050" dirty="0"/>
           </a:p>
@@ -13875,7 +13875,7 @@
                 <a:ea typeface="Montserrat" pitchFamily="34" charset="-122"/>
                 <a:cs typeface="Montserrat" pitchFamily="34" charset="-120"/>
               </a:rPr>
-              <a:t>The page contract: ten layers, one accountable owner</a:t>
+              <a:t>One page, ten checks, one owner</a:t>
             </a:r>
             <a:endParaRPr lang="en-US" sz="3000" dirty="0"/>
           </a:p>
@@ -15532,7 +15532,7 @@
                 <a:ea typeface="Montserrat" pitchFamily="34" charset="-122"/>
                 <a:cs typeface="Montserrat" pitchFamily="34" charset="-120"/>
               </a:rPr>
-              <a:t>24 assets should behave like one system</a:t>
+              <a:t>24 assets, working like one system</a:t>
             </a:r>
             <a:endParaRPr lang="en-US" sz="3000" dirty="0"/>
           </a:p>
@@ -16058,7 +16058,7 @@
                 <a:ea typeface="Montserrat" pitchFamily="34" charset="-122"/>
                 <a:cs typeface="Montserrat" pitchFamily="34" charset="-120"/>
               </a:rPr>
-              <a:t>Parent ownership prevents cannibalization. Contextual links move readers toward the right answer and the right next step.</a:t>
+              <a:t>One page owns each topic, so pages stop competing with each other. Links guide readers to the right answer, then the next step.</a:t>
             </a:r>
             <a:endParaRPr lang="en-US" sz="1600" dirty="0"/>
           </a:p>
